--- a/Holy Forever.pptx
+++ b/Holy Forever.pptx
@@ -13,15 +13,16 @@
     <p:sldId id="276" r:id="rId7"/>
     <p:sldId id="278" r:id="rId8"/>
     <p:sldId id="288" r:id="rId9"/>
-    <p:sldId id="289" r:id="rId10"/>
-    <p:sldId id="280" r:id="rId11"/>
-    <p:sldId id="290" r:id="rId12"/>
-    <p:sldId id="291" r:id="rId13"/>
-    <p:sldId id="296" r:id="rId14"/>
-    <p:sldId id="297" r:id="rId15"/>
-    <p:sldId id="292" r:id="rId16"/>
-    <p:sldId id="293" r:id="rId17"/>
-    <p:sldId id="294" r:id="rId18"/>
+    <p:sldId id="298" r:id="rId10"/>
+    <p:sldId id="289" r:id="rId11"/>
+    <p:sldId id="280" r:id="rId12"/>
+    <p:sldId id="290" r:id="rId13"/>
+    <p:sldId id="291" r:id="rId14"/>
+    <p:sldId id="296" r:id="rId15"/>
+    <p:sldId id="297" r:id="rId16"/>
+    <p:sldId id="292" r:id="rId17"/>
+    <p:sldId id="293" r:id="rId18"/>
+    <p:sldId id="294" r:id="rId19"/>
   </p:sldIdLst>
   <p:sldSz cx="9144000" cy="6858000" type="screen4x3"/>
   <p:notesSz cx="6858000" cy="9144000"/>
@@ -259,7 +260,7 @@
           <a:p>
             <a:fld id="{E759A0DE-F190-5444-87AC-4719D5F20D15}" type="datetimeFigureOut">
               <a:rPr lang="en-US" smtClean="0"/>
-              <a:t>8/22/26</a:t>
+              <a:t>10/21/26</a:t>
             </a:fld>
             <a:endParaRPr lang="en-US"/>
           </a:p>
@@ -429,7 +430,7 @@
           <a:p>
             <a:fld id="{E759A0DE-F190-5444-87AC-4719D5F20D15}" type="datetimeFigureOut">
               <a:rPr lang="en-US" smtClean="0"/>
-              <a:t>8/22/26</a:t>
+              <a:t>10/21/26</a:t>
             </a:fld>
             <a:endParaRPr lang="en-US"/>
           </a:p>
@@ -609,7 +610,7 @@
           <a:p>
             <a:fld id="{E759A0DE-F190-5444-87AC-4719D5F20D15}" type="datetimeFigureOut">
               <a:rPr lang="en-US" smtClean="0"/>
-              <a:t>8/22/26</a:t>
+              <a:t>10/21/26</a:t>
             </a:fld>
             <a:endParaRPr lang="en-US"/>
           </a:p>
@@ -779,7 +780,7 @@
           <a:p>
             <a:fld id="{E759A0DE-F190-5444-87AC-4719D5F20D15}" type="datetimeFigureOut">
               <a:rPr lang="en-US" smtClean="0"/>
-              <a:t>8/22/26</a:t>
+              <a:t>10/21/26</a:t>
             </a:fld>
             <a:endParaRPr lang="en-US"/>
           </a:p>
@@ -1025,7 +1026,7 @@
           <a:p>
             <a:fld id="{E759A0DE-F190-5444-87AC-4719D5F20D15}" type="datetimeFigureOut">
               <a:rPr lang="en-US" smtClean="0"/>
-              <a:t>8/22/26</a:t>
+              <a:t>10/21/26</a:t>
             </a:fld>
             <a:endParaRPr lang="en-US"/>
           </a:p>
@@ -1257,7 +1258,7 @@
           <a:p>
             <a:fld id="{E759A0DE-F190-5444-87AC-4719D5F20D15}" type="datetimeFigureOut">
               <a:rPr lang="en-US" smtClean="0"/>
-              <a:t>8/22/26</a:t>
+              <a:t>10/21/26</a:t>
             </a:fld>
             <a:endParaRPr lang="en-US"/>
           </a:p>
@@ -1624,7 +1625,7 @@
           <a:p>
             <a:fld id="{E759A0DE-F190-5444-87AC-4719D5F20D15}" type="datetimeFigureOut">
               <a:rPr lang="en-US" smtClean="0"/>
-              <a:t>8/22/26</a:t>
+              <a:t>10/21/26</a:t>
             </a:fld>
             <a:endParaRPr lang="en-US"/>
           </a:p>
@@ -1742,7 +1743,7 @@
           <a:p>
             <a:fld id="{E759A0DE-F190-5444-87AC-4719D5F20D15}" type="datetimeFigureOut">
               <a:rPr lang="en-US" smtClean="0"/>
-              <a:t>8/22/26</a:t>
+              <a:t>10/21/26</a:t>
             </a:fld>
             <a:endParaRPr lang="en-US"/>
           </a:p>
@@ -1837,7 +1838,7 @@
           <a:p>
             <a:fld id="{E759A0DE-F190-5444-87AC-4719D5F20D15}" type="datetimeFigureOut">
               <a:rPr lang="en-US" smtClean="0"/>
-              <a:t>8/22/26</a:t>
+              <a:t>10/21/26</a:t>
             </a:fld>
             <a:endParaRPr lang="en-US"/>
           </a:p>
@@ -2114,7 +2115,7 @@
           <a:p>
             <a:fld id="{E759A0DE-F190-5444-87AC-4719D5F20D15}" type="datetimeFigureOut">
               <a:rPr lang="en-US" smtClean="0"/>
-              <a:t>8/22/26</a:t>
+              <a:t>10/21/26</a:t>
             </a:fld>
             <a:endParaRPr lang="en-US"/>
           </a:p>
@@ -2371,7 +2372,7 @@
           <a:p>
             <a:fld id="{E759A0DE-F190-5444-87AC-4719D5F20D15}" type="datetimeFigureOut">
               <a:rPr lang="en-US" smtClean="0"/>
-              <a:t>8/22/26</a:t>
+              <a:t>10/21/26</a:t>
             </a:fld>
             <a:endParaRPr lang="en-US"/>
           </a:p>
@@ -2584,7 +2585,7 @@
           <a:p>
             <a:fld id="{E759A0DE-F190-5444-87AC-4719D5F20D15}" type="datetimeFigureOut">
               <a:rPr lang="en-US" smtClean="0"/>
-              <a:t>8/22/26</a:t>
+              <a:t>10/21/26</a:t>
             </a:fld>
             <a:endParaRPr lang="en-US"/>
           </a:p>
@@ -3158,6 +3159,148 @@
         <p:cNvPr id="1" name="">
           <a:extLst>
             <a:ext uri="{FF2B5EF4-FFF2-40B4-BE49-F238E27FC236}">
+              <a16:creationId xmlns:a16="http://schemas.microsoft.com/office/drawing/2014/main" id="{1651CC6A-1E8A-66BC-42DF-F1D3B7E3CF70}"/>
+            </a:ext>
+          </a:extLst>
+        </p:cNvPr>
+        <p:cNvGrpSpPr/>
+        <p:nvPr/>
+      </p:nvGrpSpPr>
+      <p:grpSpPr>
+        <a:xfrm>
+          <a:off x="0" y="0"/>
+          <a:ext cx="0" cy="0"/>
+          <a:chOff x="0" y="0"/>
+          <a:chExt cx="0" cy="0"/>
+        </a:xfrm>
+      </p:grpSpPr>
+      <p:sp>
+        <p:nvSpPr>
+          <p:cNvPr id="3" name="Subtitle 2">
+            <a:extLst>
+              <a:ext uri="{FF2B5EF4-FFF2-40B4-BE49-F238E27FC236}">
+                <a16:creationId xmlns:a16="http://schemas.microsoft.com/office/drawing/2014/main" id="{9B9D23CB-A920-4E3B-455F-0A28CC677C2B}"/>
+              </a:ext>
+            </a:extLst>
+          </p:cNvPr>
+          <p:cNvSpPr>
+            <a:spLocks noGrp="1"/>
+          </p:cNvSpPr>
+          <p:nvPr>
+            <p:ph type="subTitle" idx="1"/>
+          </p:nvPr>
+        </p:nvSpPr>
+        <p:spPr>
+          <a:xfrm>
+            <a:off x="144379" y="207818"/>
+            <a:ext cx="8903369" cy="6386945"/>
+          </a:xfrm>
+        </p:spPr>
+        <p:txBody>
+          <a:bodyPr>
+            <a:noAutofit/>
+          </a:bodyPr>
+          <a:lstStyle/>
+          <a:p>
+            <a:r>
+              <a:rPr lang="en-US" sz="5400" dirty="0">
+                <a:solidFill>
+                  <a:schemeClr val="bg1"/>
+                </a:solidFill>
+                <a:latin typeface="Avenir Medium" panose="02000503020000020003" pitchFamily="2" charset="0"/>
+                <a:ea typeface="Bodoni Ornaments" pitchFamily="2" charset="0"/>
+              </a:rPr>
+              <a:t> </a:t>
+            </a:r>
+          </a:p>
+          <a:p>
+            <a:r>
+              <a:rPr lang="en-US" sz="5400" dirty="0">
+                <a:solidFill>
+                  <a:schemeClr val="bg1"/>
+                </a:solidFill>
+                <a:latin typeface="Avenir Medium" panose="02000503020000020003" pitchFamily="2" charset="0"/>
+                <a:ea typeface="Bodoni Ornaments" pitchFamily="2" charset="0"/>
+              </a:rPr>
+              <a:t>And the angels cry "Holy"</a:t>
+            </a:r>
+          </a:p>
+          <a:p>
+            <a:r>
+              <a:rPr lang="en-US" sz="5400" dirty="0">
+                <a:solidFill>
+                  <a:schemeClr val="bg1"/>
+                </a:solidFill>
+                <a:latin typeface="Avenir Medium" panose="02000503020000020003" pitchFamily="2" charset="0"/>
+                <a:ea typeface="Bodoni Ornaments" pitchFamily="2" charset="0"/>
+              </a:rPr>
+              <a:t>All creation cries "Holy"</a:t>
+            </a:r>
+          </a:p>
+          <a:p>
+            <a:endParaRPr lang="en-US" sz="5400" dirty="0">
+              <a:solidFill>
+                <a:schemeClr val="bg1"/>
+              </a:solidFill>
+              <a:latin typeface="Avenir Medium" panose="02000503020000020003" pitchFamily="2" charset="0"/>
+              <a:ea typeface="Bodoni Ornaments" pitchFamily="2" charset="0"/>
+            </a:endParaRPr>
+          </a:p>
+          <a:p>
+            <a:r>
+              <a:rPr lang="en-US" sz="5400" dirty="0">
+                <a:solidFill>
+                  <a:schemeClr val="bg1"/>
+                </a:solidFill>
+                <a:latin typeface="Avenir Medium" panose="02000503020000020003" pitchFamily="2" charset="0"/>
+                <a:ea typeface="Bodoni Ornaments" pitchFamily="2" charset="0"/>
+              </a:rPr>
+              <a:t>You are lifted high, </a:t>
+            </a:r>
+          </a:p>
+          <a:p>
+            <a:r>
+              <a:rPr lang="en-US" sz="5400" dirty="0">
+                <a:solidFill>
+                  <a:schemeClr val="bg1"/>
+                </a:solidFill>
+                <a:latin typeface="Avenir Medium" panose="02000503020000020003" pitchFamily="2" charset="0"/>
+                <a:ea typeface="Bodoni Ornaments" pitchFamily="2" charset="0"/>
+              </a:rPr>
+              <a:t>Holy Holy forever</a:t>
+            </a:r>
+          </a:p>
+        </p:txBody>
+      </p:sp>
+    </p:spTree>
+    <p:extLst>
+      <p:ext uri="{BB962C8B-B14F-4D97-AF65-F5344CB8AC3E}">
+        <p14:creationId xmlns:p14="http://schemas.microsoft.com/office/powerpoint/2010/main" val="95335863"/>
+      </p:ext>
+    </p:extLst>
+  </p:cSld>
+  <p:clrMapOvr>
+    <a:masterClrMapping/>
+  </p:clrMapOvr>
+</p:sld>
+</file>
+
+<file path=ppt/slides/slide11.xml><?xml version="1.0" encoding="utf-8"?>
+<p:sld xmlns:a="http://schemas.openxmlformats.org/drawingml/2006/main" xmlns:r="http://schemas.openxmlformats.org/officeDocument/2006/relationships" xmlns:p="http://schemas.openxmlformats.org/presentationml/2006/main">
+  <p:cSld>
+    <p:bg>
+      <p:bgPr>
+        <a:solidFill>
+          <a:schemeClr val="tx1"/>
+        </a:solidFill>
+        <a:effectLst/>
+      </p:bgPr>
+    </p:bg>
+    <p:spTree>
+      <p:nvGrpSpPr>
+        <p:cNvPr id="1" name="">
+          <a:extLst>
+            <a:ext uri="{FF2B5EF4-FFF2-40B4-BE49-F238E27FC236}">
               <a16:creationId xmlns:a16="http://schemas.microsoft.com/office/drawing/2014/main" id="{BD880269-F0C2-8131-4EE0-D78851E0F0DF}"/>
             </a:ext>
           </a:extLst>
@@ -3202,7 +3345,7 @@
           <a:lstStyle/>
           <a:p>
             <a:r>
-              <a:rPr lang="en-US" sz="4400" dirty="0">
+              <a:rPr lang="en-US" sz="5400" dirty="0">
                 <a:solidFill>
                   <a:schemeClr val="bg1"/>
                 </a:solidFill>
@@ -3213,17 +3356,8 @@
             </a:r>
           </a:p>
           <a:p>
-            <a:endParaRPr lang="en-US" sz="4400" dirty="0">
-              <a:solidFill>
-                <a:schemeClr val="bg1"/>
-              </a:solidFill>
-              <a:latin typeface="Avenir Medium" panose="02000503020000020003" pitchFamily="2" charset="0"/>
-              <a:ea typeface="Bodoni Ornaments" pitchFamily="2" charset="0"/>
-            </a:endParaRPr>
-          </a:p>
-          <a:p>
-            <a:r>
-              <a:rPr lang="en-US" sz="4400" dirty="0">
+            <a:r>
+              <a:rPr lang="en-US" sz="5400" dirty="0">
                 <a:solidFill>
                   <a:schemeClr val="bg1"/>
                 </a:solidFill>
@@ -3235,7 +3369,7 @@
           </a:p>
           <a:p>
             <a:r>
-              <a:rPr lang="en-US" sz="4400" dirty="0">
+              <a:rPr lang="en-US" sz="5400" dirty="0">
                 <a:solidFill>
                   <a:schemeClr val="bg1"/>
                 </a:solidFill>
@@ -3247,7 +3381,7 @@
           </a:p>
           <a:p>
             <a:r>
-              <a:rPr lang="en-US" sz="4400" dirty="0">
+              <a:rPr lang="en-US" sz="5400" dirty="0">
                 <a:solidFill>
                   <a:schemeClr val="bg1"/>
                 </a:solidFill>
@@ -3259,7 +3393,7 @@
           </a:p>
           <a:p>
             <a:r>
-              <a:rPr lang="en-US" sz="4400" dirty="0">
+              <a:rPr lang="en-US" sz="5400" dirty="0">
                 <a:solidFill>
                   <a:schemeClr val="bg1"/>
                 </a:solidFill>
@@ -3284,7 +3418,7 @@
 </p:sld>
 </file>
 
-<file path=ppt/slides/slide11.xml><?xml version="1.0" encoding="utf-8"?>
+<file path=ppt/slides/slide12.xml><?xml version="1.0" encoding="utf-8"?>
 <p:sld xmlns:a="http://schemas.openxmlformats.org/drawingml/2006/main" xmlns:r="http://schemas.openxmlformats.org/officeDocument/2006/relationships" xmlns:p="http://schemas.openxmlformats.org/presentationml/2006/main">
   <p:cSld>
     <p:bg>
@@ -3343,7 +3477,7 @@
           </a:bodyPr>
           <a:lstStyle/>
           <a:p>
-            <a:endParaRPr lang="en-US" sz="4400" dirty="0">
+            <a:endParaRPr lang="en-US" sz="5400" dirty="0">
               <a:solidFill>
                 <a:schemeClr val="bg1"/>
               </a:solidFill>
@@ -3352,17 +3486,8 @@
             </a:endParaRPr>
           </a:p>
           <a:p>
-            <a:endParaRPr lang="en-US" sz="4400" dirty="0">
-              <a:solidFill>
-                <a:schemeClr val="bg1"/>
-              </a:solidFill>
-              <a:latin typeface="Avenir Medium" panose="02000503020000020003" pitchFamily="2" charset="0"/>
-              <a:ea typeface="Bodoni Ornaments" pitchFamily="2" charset="0"/>
-            </a:endParaRPr>
-          </a:p>
-          <a:p>
-            <a:r>
-              <a:rPr lang="en-US" sz="4400" dirty="0">
+            <a:r>
+              <a:rPr lang="en-US" sz="5400" dirty="0">
                 <a:solidFill>
                   <a:schemeClr val="bg1"/>
                 </a:solidFill>
@@ -3374,7 +3499,7 @@
           </a:p>
           <a:p>
             <a:r>
-              <a:rPr lang="en-US" sz="4400" dirty="0">
+              <a:rPr lang="en-US" sz="5400" dirty="0">
                 <a:solidFill>
                   <a:schemeClr val="bg1"/>
                 </a:solidFill>
@@ -3386,7 +3511,7 @@
           </a:p>
           <a:p>
             <a:r>
-              <a:rPr lang="en-US" sz="4400" dirty="0">
+              <a:rPr lang="en-US" sz="5400" dirty="0">
                 <a:solidFill>
                   <a:schemeClr val="bg1"/>
                 </a:solidFill>
@@ -3398,7 +3523,7 @@
           </a:p>
           <a:p>
             <a:r>
-              <a:rPr lang="en-US" sz="4400" dirty="0">
+              <a:rPr lang="en-US" sz="5400" dirty="0">
                 <a:solidFill>
                   <a:schemeClr val="bg1"/>
                 </a:solidFill>
@@ -3423,7 +3548,7 @@
 </p:sld>
 </file>
 
-<file path=ppt/slides/slide12.xml><?xml version="1.0" encoding="utf-8"?>
+<file path=ppt/slides/slide13.xml><?xml version="1.0" encoding="utf-8"?>
 <p:sld xmlns:a="http://schemas.openxmlformats.org/drawingml/2006/main" xmlns:r="http://schemas.openxmlformats.org/officeDocument/2006/relationships" xmlns:p="http://schemas.openxmlformats.org/presentationml/2006/main">
   <p:cSld>
     <p:bg>
@@ -3482,7 +3607,7 @@
           </a:bodyPr>
           <a:lstStyle/>
           <a:p>
-            <a:endParaRPr lang="en-US" sz="4400" dirty="0">
+            <a:endParaRPr lang="en-US" sz="5400" dirty="0">
               <a:solidFill>
                 <a:schemeClr val="bg1"/>
               </a:solidFill>
@@ -3491,17 +3616,8 @@
             </a:endParaRPr>
           </a:p>
           <a:p>
-            <a:endParaRPr lang="en-US" sz="4400" dirty="0">
-              <a:solidFill>
-                <a:schemeClr val="bg1"/>
-              </a:solidFill>
-              <a:latin typeface="Avenir Medium" panose="02000503020000020003" pitchFamily="2" charset="0"/>
-              <a:ea typeface="Bodoni Ornaments" pitchFamily="2" charset="0"/>
-            </a:endParaRPr>
-          </a:p>
-          <a:p>
-            <a:r>
-              <a:rPr lang="en-US" sz="4400" dirty="0">
+            <a:r>
+              <a:rPr lang="en-US" sz="5400" dirty="0">
                 <a:solidFill>
                   <a:schemeClr val="bg1"/>
                 </a:solidFill>
@@ -3513,7 +3629,7 @@
           </a:p>
           <a:p>
             <a:r>
-              <a:rPr lang="en-US" sz="4400" dirty="0">
+              <a:rPr lang="en-US" sz="5400" dirty="0">
                 <a:solidFill>
                   <a:schemeClr val="bg1"/>
                 </a:solidFill>
@@ -3525,7 +3641,7 @@
           </a:p>
           <a:p>
             <a:r>
-              <a:rPr lang="en-US" sz="4400" dirty="0">
+              <a:rPr lang="en-US" sz="5400" dirty="0">
                 <a:solidFill>
                   <a:schemeClr val="bg1"/>
                 </a:solidFill>
@@ -3537,7 +3653,7 @@
           </a:p>
           <a:p>
             <a:r>
-              <a:rPr lang="en-US" sz="4400" dirty="0">
+              <a:rPr lang="en-US" sz="5400" dirty="0">
                 <a:solidFill>
                   <a:schemeClr val="bg1"/>
                 </a:solidFill>
@@ -3562,7 +3678,7 @@
 </p:sld>
 </file>
 
-<file path=ppt/slides/slide13.xml><?xml version="1.0" encoding="utf-8"?>
+<file path=ppt/slides/slide14.xml><?xml version="1.0" encoding="utf-8"?>
 <p:sld xmlns:a="http://schemas.openxmlformats.org/drawingml/2006/main" xmlns:r="http://schemas.openxmlformats.org/officeDocument/2006/relationships" xmlns:p="http://schemas.openxmlformats.org/presentationml/2006/main">
   <p:cSld>
     <p:bg>
@@ -3621,7 +3737,7 @@
           </a:bodyPr>
           <a:lstStyle/>
           <a:p>
-            <a:endParaRPr lang="en-US" sz="4400" dirty="0">
+            <a:endParaRPr lang="en-US" sz="5400" dirty="0">
               <a:solidFill>
                 <a:schemeClr val="bg1"/>
               </a:solidFill>
@@ -3630,17 +3746,8 @@
             </a:endParaRPr>
           </a:p>
           <a:p>
-            <a:endParaRPr lang="en-US" sz="4400" dirty="0">
-              <a:solidFill>
-                <a:schemeClr val="bg1"/>
-              </a:solidFill>
-              <a:latin typeface="Avenir Medium" panose="02000503020000020003" pitchFamily="2" charset="0"/>
-              <a:ea typeface="Bodoni Ornaments" pitchFamily="2" charset="0"/>
-            </a:endParaRPr>
-          </a:p>
-          <a:p>
-            <a:r>
-              <a:rPr lang="en-US" sz="4400" dirty="0">
+            <a:r>
+              <a:rPr lang="en-US" sz="5400" dirty="0">
                 <a:solidFill>
                   <a:schemeClr val="bg1"/>
                 </a:solidFill>
@@ -3652,7 +3759,7 @@
           </a:p>
           <a:p>
             <a:r>
-              <a:rPr lang="en-US" sz="4400" dirty="0">
+              <a:rPr lang="en-US" sz="5400" dirty="0">
                 <a:solidFill>
                   <a:schemeClr val="bg1"/>
                 </a:solidFill>
@@ -3664,7 +3771,7 @@
           </a:p>
           <a:p>
             <a:r>
-              <a:rPr lang="en-US" sz="4400" dirty="0">
+              <a:rPr lang="en-US" sz="5400" dirty="0">
                 <a:solidFill>
                   <a:schemeClr val="bg1"/>
                 </a:solidFill>
@@ -3676,7 +3783,7 @@
           </a:p>
           <a:p>
             <a:r>
-              <a:rPr lang="en-US" sz="4400" dirty="0">
+              <a:rPr lang="en-US" sz="5400" dirty="0">
                 <a:solidFill>
                   <a:schemeClr val="bg1"/>
                 </a:solidFill>
@@ -3701,7 +3808,7 @@
 </p:sld>
 </file>
 
-<file path=ppt/slides/slide14.xml><?xml version="1.0" encoding="utf-8"?>
+<file path=ppt/slides/slide15.xml><?xml version="1.0" encoding="utf-8"?>
 <p:sld xmlns:a="http://schemas.openxmlformats.org/drawingml/2006/main" xmlns:r="http://schemas.openxmlformats.org/officeDocument/2006/relationships" xmlns:p="http://schemas.openxmlformats.org/presentationml/2006/main">
   <p:cSld>
     <p:bg>
@@ -3760,7 +3867,7 @@
           </a:bodyPr>
           <a:lstStyle/>
           <a:p>
-            <a:endParaRPr lang="en-US" sz="4400" dirty="0">
+            <a:endParaRPr lang="en-US" sz="5400" dirty="0">
               <a:solidFill>
                 <a:schemeClr val="bg1"/>
               </a:solidFill>
@@ -3769,17 +3876,8 @@
             </a:endParaRPr>
           </a:p>
           <a:p>
-            <a:endParaRPr lang="en-US" sz="4400" dirty="0">
-              <a:solidFill>
-                <a:schemeClr val="bg1"/>
-              </a:solidFill>
-              <a:latin typeface="Avenir Medium" panose="02000503020000020003" pitchFamily="2" charset="0"/>
-              <a:ea typeface="Bodoni Ornaments" pitchFamily="2" charset="0"/>
-            </a:endParaRPr>
-          </a:p>
-          <a:p>
-            <a:r>
-              <a:rPr lang="en-US" sz="4400" dirty="0">
+            <a:r>
+              <a:rPr lang="en-US" sz="5400" dirty="0">
                 <a:solidFill>
                   <a:schemeClr val="bg1"/>
                 </a:solidFill>
@@ -3791,7 +3889,7 @@
           </a:p>
           <a:p>
             <a:r>
-              <a:rPr lang="en-US" sz="4400" dirty="0">
+              <a:rPr lang="en-US" sz="5400" dirty="0">
                 <a:solidFill>
                   <a:schemeClr val="bg1"/>
                 </a:solidFill>
@@ -3803,7 +3901,7 @@
           </a:p>
           <a:p>
             <a:r>
-              <a:rPr lang="en-US" sz="4400" dirty="0">
+              <a:rPr lang="en-US" sz="5400" dirty="0">
                 <a:solidFill>
                   <a:schemeClr val="bg1"/>
                 </a:solidFill>
@@ -3815,7 +3913,7 @@
           </a:p>
           <a:p>
             <a:r>
-              <a:rPr lang="en-US" sz="4400" dirty="0">
+              <a:rPr lang="en-US" sz="5400" dirty="0">
                 <a:solidFill>
                   <a:schemeClr val="bg1"/>
                 </a:solidFill>
@@ -3840,7 +3938,7 @@
 </p:sld>
 </file>
 
-<file path=ppt/slides/slide15.xml><?xml version="1.0" encoding="utf-8"?>
+<file path=ppt/slides/slide16.xml><?xml version="1.0" encoding="utf-8"?>
 <p:sld xmlns:a="http://schemas.openxmlformats.org/drawingml/2006/main" xmlns:r="http://schemas.openxmlformats.org/officeDocument/2006/relationships" xmlns:p="http://schemas.openxmlformats.org/presentationml/2006/main">
   <p:cSld>
     <p:bg>
@@ -3900,7 +3998,7 @@
           <a:lstStyle/>
           <a:p>
             <a:r>
-              <a:rPr lang="en-US" sz="4400" dirty="0">
+              <a:rPr lang="en-US" sz="5400" dirty="0">
                 <a:solidFill>
                   <a:schemeClr val="bg1"/>
                 </a:solidFill>
@@ -3911,17 +4009,8 @@
             </a:r>
           </a:p>
           <a:p>
-            <a:endParaRPr lang="en-US" sz="4400" dirty="0">
-              <a:solidFill>
-                <a:schemeClr val="bg1"/>
-              </a:solidFill>
-              <a:latin typeface="Avenir Medium" panose="02000503020000020003" pitchFamily="2" charset="0"/>
-              <a:ea typeface="Bodoni Ornaments" pitchFamily="2" charset="0"/>
-            </a:endParaRPr>
-          </a:p>
-          <a:p>
-            <a:r>
-              <a:rPr lang="en-US" sz="4400" dirty="0">
+            <a:r>
+              <a:rPr lang="en-US" sz="5400" dirty="0">
                 <a:solidFill>
                   <a:schemeClr val="bg1"/>
                 </a:solidFill>
@@ -3933,7 +4022,7 @@
           </a:p>
           <a:p>
             <a:r>
-              <a:rPr lang="en-US" sz="4400" dirty="0">
+              <a:rPr lang="en-US" sz="5400" dirty="0">
                 <a:solidFill>
                   <a:schemeClr val="bg1"/>
                 </a:solidFill>
@@ -3945,7 +4034,7 @@
           </a:p>
           <a:p>
             <a:r>
-              <a:rPr lang="en-US" sz="4400" dirty="0">
+              <a:rPr lang="en-US" sz="5400" dirty="0">
                 <a:solidFill>
                   <a:schemeClr val="bg1"/>
                 </a:solidFill>
@@ -3957,7 +4046,7 @@
           </a:p>
           <a:p>
             <a:r>
-              <a:rPr lang="en-US" sz="4400" dirty="0">
+              <a:rPr lang="en-US" sz="5400" dirty="0">
                 <a:solidFill>
                   <a:schemeClr val="bg1"/>
                 </a:solidFill>
@@ -3982,7 +4071,7 @@
 </p:sld>
 </file>
 
-<file path=ppt/slides/slide16.xml><?xml version="1.0" encoding="utf-8"?>
+<file path=ppt/slides/slide17.xml><?xml version="1.0" encoding="utf-8"?>
 <p:sld xmlns:a="http://schemas.openxmlformats.org/drawingml/2006/main" xmlns:r="http://schemas.openxmlformats.org/officeDocument/2006/relationships" xmlns:p="http://schemas.openxmlformats.org/presentationml/2006/main">
   <p:cSld>
     <p:bg>
@@ -4042,7 +4131,7 @@
           <a:lstStyle/>
           <a:p>
             <a:r>
-              <a:rPr lang="en-US" sz="4400" dirty="0">
+              <a:rPr lang="en-US" sz="5400" dirty="0">
                 <a:solidFill>
                   <a:schemeClr val="bg1"/>
                 </a:solidFill>
@@ -4053,17 +4142,8 @@
             </a:r>
           </a:p>
           <a:p>
-            <a:endParaRPr lang="en-US" sz="4400" dirty="0">
-              <a:solidFill>
-                <a:schemeClr val="bg1"/>
-              </a:solidFill>
-              <a:latin typeface="Avenir Medium" panose="02000503020000020003" pitchFamily="2" charset="0"/>
-              <a:ea typeface="Bodoni Ornaments" pitchFamily="2" charset="0"/>
-            </a:endParaRPr>
-          </a:p>
-          <a:p>
-            <a:r>
-              <a:rPr lang="en-US" sz="4400" dirty="0">
+            <a:r>
+              <a:rPr lang="en-US" sz="5400" dirty="0">
                 <a:solidFill>
                   <a:schemeClr val="bg1"/>
                 </a:solidFill>
@@ -4075,7 +4155,7 @@
           </a:p>
           <a:p>
             <a:r>
-              <a:rPr lang="en-US" sz="4400" dirty="0">
+              <a:rPr lang="en-US" sz="5400" dirty="0">
                 <a:solidFill>
                   <a:schemeClr val="bg1"/>
                 </a:solidFill>
@@ -4087,7 +4167,7 @@
           </a:p>
           <a:p>
             <a:r>
-              <a:rPr lang="en-US" sz="4400" dirty="0">
+              <a:rPr lang="en-US" sz="5400" dirty="0">
                 <a:solidFill>
                   <a:schemeClr val="bg1"/>
                 </a:solidFill>
@@ -4099,7 +4179,7 @@
           </a:p>
           <a:p>
             <a:r>
-              <a:rPr lang="en-US" sz="4400" dirty="0">
+              <a:rPr lang="en-US" sz="5400" dirty="0">
                 <a:solidFill>
                   <a:schemeClr val="bg1"/>
                 </a:solidFill>
@@ -4124,7 +4204,7 @@
 </p:sld>
 </file>
 
-<file path=ppt/slides/slide17.xml><?xml version="1.0" encoding="utf-8"?>
+<file path=ppt/slides/slide18.xml><?xml version="1.0" encoding="utf-8"?>
 <p:sld xmlns:a="http://schemas.openxmlformats.org/drawingml/2006/main" xmlns:r="http://schemas.openxmlformats.org/officeDocument/2006/relationships" xmlns:p="http://schemas.openxmlformats.org/presentationml/2006/main">
   <p:cSld>
     <p:bg>
@@ -4184,7 +4264,7 @@
           <a:lstStyle/>
           <a:p>
             <a:r>
-              <a:rPr lang="en-US" sz="4400" dirty="0">
+              <a:rPr lang="en-US" sz="5400" dirty="0">
                 <a:solidFill>
                   <a:schemeClr val="bg1"/>
                 </a:solidFill>
@@ -4195,7 +4275,7 @@
             </a:r>
           </a:p>
           <a:p>
-            <a:endParaRPr lang="en-US" sz="4400" dirty="0">
+            <a:endParaRPr lang="en-US" sz="5400" dirty="0">
               <a:solidFill>
                 <a:schemeClr val="bg1"/>
               </a:solidFill>
@@ -4205,7 +4285,7 @@
           </a:p>
           <a:p>
             <a:r>
-              <a:rPr lang="en-US" sz="4400" dirty="0">
+              <a:rPr lang="en-US" sz="5400" dirty="0">
                 <a:solidFill>
                   <a:schemeClr val="bg1"/>
                 </a:solidFill>
@@ -4217,7 +4297,7 @@
           </a:p>
           <a:p>
             <a:r>
-              <a:rPr lang="en-US" sz="4400" dirty="0">
+              <a:rPr lang="en-US" sz="5400" dirty="0">
                 <a:solidFill>
                   <a:schemeClr val="bg1"/>
                 </a:solidFill>
@@ -4302,7 +4382,7 @@
           <a:lstStyle/>
           <a:p>
             <a:r>
-              <a:rPr lang="en-US" sz="4400" dirty="0">
+              <a:rPr lang="en-US" sz="5400" dirty="0">
                 <a:solidFill>
                   <a:schemeClr val="bg1"/>
                 </a:solidFill>
@@ -4313,7 +4393,31 @@
             </a:r>
           </a:p>
           <a:p>
-            <a:endParaRPr lang="en-US" sz="4400" dirty="0">
+            <a:r>
+              <a:rPr lang="en-US" sz="5400" dirty="0">
+                <a:solidFill>
+                  <a:schemeClr val="bg1"/>
+                </a:solidFill>
+                <a:latin typeface="Avenir Medium" panose="02000503020000020003" pitchFamily="2" charset="0"/>
+                <a:ea typeface="Bodoni Ornaments" pitchFamily="2" charset="0"/>
+              </a:rPr>
+              <a:t>A thousand generations </a:t>
+            </a:r>
+          </a:p>
+          <a:p>
+            <a:r>
+              <a:rPr lang="en-US" sz="5400" dirty="0">
+                <a:solidFill>
+                  <a:schemeClr val="bg1"/>
+                </a:solidFill>
+                <a:latin typeface="Avenir Medium" panose="02000503020000020003" pitchFamily="2" charset="0"/>
+                <a:ea typeface="Bodoni Ornaments" pitchFamily="2" charset="0"/>
+              </a:rPr>
+              <a:t>falling down in worship</a:t>
+            </a:r>
+          </a:p>
+          <a:p>
+            <a:endParaRPr lang="en-US" sz="5400" dirty="0">
               <a:solidFill>
                 <a:schemeClr val="bg1"/>
               </a:solidFill>
@@ -4323,31 +4427,7 @@
           </a:p>
           <a:p>
             <a:r>
-              <a:rPr lang="en-US" sz="4400" dirty="0">
-                <a:solidFill>
-                  <a:schemeClr val="bg1"/>
-                </a:solidFill>
-                <a:latin typeface="Avenir Medium" panose="02000503020000020003" pitchFamily="2" charset="0"/>
-                <a:ea typeface="Bodoni Ornaments" pitchFamily="2" charset="0"/>
-              </a:rPr>
-              <a:t>A thousand generations </a:t>
-            </a:r>
-          </a:p>
-          <a:p>
-            <a:r>
-              <a:rPr lang="en-US" sz="4400" dirty="0">
-                <a:solidFill>
-                  <a:schemeClr val="bg1"/>
-                </a:solidFill>
-                <a:latin typeface="Avenir Medium" panose="02000503020000020003" pitchFamily="2" charset="0"/>
-                <a:ea typeface="Bodoni Ornaments" pitchFamily="2" charset="0"/>
-              </a:rPr>
-              <a:t>falling down in worship</a:t>
-            </a:r>
-          </a:p>
-          <a:p>
-            <a:r>
-              <a:rPr lang="en-US" sz="4400" dirty="0">
+              <a:rPr lang="en-US" sz="5400" dirty="0">
                 <a:solidFill>
                   <a:schemeClr val="bg1"/>
                 </a:solidFill>
@@ -4359,7 +4439,7 @@
           </a:p>
           <a:p>
             <a:r>
-              <a:rPr lang="en-US" sz="4400" dirty="0">
+              <a:rPr lang="en-US" sz="5400" dirty="0">
                 <a:solidFill>
                   <a:schemeClr val="bg1"/>
                 </a:solidFill>
@@ -4444,7 +4524,7 @@
           <a:lstStyle/>
           <a:p>
             <a:r>
-              <a:rPr lang="en-US" sz="4400" dirty="0">
+              <a:rPr lang="en-US" sz="5400" dirty="0">
                 <a:solidFill>
                   <a:schemeClr val="bg1"/>
                 </a:solidFill>
@@ -4455,29 +4535,32 @@
             </a:r>
           </a:p>
           <a:p>
-            <a:endParaRPr lang="en-US" sz="4400" dirty="0">
-              <a:solidFill>
-                <a:schemeClr val="bg1"/>
-              </a:solidFill>
-              <a:latin typeface="Avenir Medium" panose="02000503020000020003" pitchFamily="2" charset="0"/>
-              <a:ea typeface="Bodoni Ornaments" pitchFamily="2" charset="0"/>
-            </a:endParaRPr>
-          </a:p>
-          <a:p>
-            <a:r>
-              <a:rPr lang="en-US" sz="4400" dirty="0">
-                <a:solidFill>
-                  <a:schemeClr val="bg1"/>
-                </a:solidFill>
-                <a:latin typeface="Avenir Medium" panose="02000503020000020003" pitchFamily="2" charset="0"/>
-                <a:ea typeface="Bodoni Ornaments" pitchFamily="2" charset="0"/>
-              </a:rPr>
-              <a:t>And all who've gone before us </a:t>
-            </a:r>
-          </a:p>
-          <a:p>
-            <a:r>
-              <a:rPr lang="en-US" sz="4400" dirty="0">
+            <a:r>
+              <a:rPr lang="en-US" sz="5400" dirty="0">
+                <a:solidFill>
+                  <a:schemeClr val="bg1"/>
+                </a:solidFill>
+                <a:latin typeface="Avenir Medium" panose="02000503020000020003" pitchFamily="2" charset="0"/>
+                <a:ea typeface="Bodoni Ornaments" pitchFamily="2" charset="0"/>
+              </a:rPr>
+              <a:t>And all who've gone </a:t>
+            </a:r>
+          </a:p>
+          <a:p>
+            <a:r>
+              <a:rPr lang="en-US" sz="5400" dirty="0">
+                <a:solidFill>
+                  <a:schemeClr val="bg1"/>
+                </a:solidFill>
+                <a:latin typeface="Avenir Medium" panose="02000503020000020003" pitchFamily="2" charset="0"/>
+                <a:ea typeface="Bodoni Ornaments" pitchFamily="2" charset="0"/>
+              </a:rPr>
+              <a:t>before us </a:t>
+            </a:r>
+          </a:p>
+          <a:p>
+            <a:r>
+              <a:rPr lang="en-US" sz="5400" dirty="0">
                 <a:solidFill>
                   <a:schemeClr val="bg1"/>
                 </a:solidFill>
@@ -4489,7 +4572,7 @@
           </a:p>
           <a:p>
             <a:r>
-              <a:rPr lang="en-US" sz="4400" dirty="0">
+              <a:rPr lang="en-US" sz="5400" dirty="0">
                 <a:solidFill>
                   <a:schemeClr val="bg1"/>
                 </a:solidFill>
@@ -4501,7 +4584,7 @@
           </a:p>
           <a:p>
             <a:r>
-              <a:rPr lang="en-US" sz="4400" dirty="0">
+              <a:rPr lang="en-US" sz="5400" dirty="0">
                 <a:solidFill>
                   <a:schemeClr val="bg1"/>
                 </a:solidFill>
@@ -4585,7 +4668,7 @@
           </a:bodyPr>
           <a:lstStyle/>
           <a:p>
-            <a:endParaRPr lang="en-US" sz="4400" dirty="0">
+            <a:endParaRPr lang="en-US" sz="5400" dirty="0">
               <a:solidFill>
                 <a:schemeClr val="bg1"/>
               </a:solidFill>
@@ -4594,17 +4677,8 @@
             </a:endParaRPr>
           </a:p>
           <a:p>
-            <a:endParaRPr lang="en-US" sz="4400" dirty="0">
-              <a:solidFill>
-                <a:schemeClr val="bg1"/>
-              </a:solidFill>
-              <a:latin typeface="Avenir Medium" panose="02000503020000020003" pitchFamily="2" charset="0"/>
-              <a:ea typeface="Bodoni Ornaments" pitchFamily="2" charset="0"/>
-            </a:endParaRPr>
-          </a:p>
-          <a:p>
-            <a:r>
-              <a:rPr lang="en-US" sz="4400" dirty="0">
+            <a:r>
+              <a:rPr lang="en-US" sz="5400" dirty="0">
                 <a:solidFill>
                   <a:schemeClr val="bg1"/>
                 </a:solidFill>
@@ -4616,7 +4690,7 @@
           </a:p>
           <a:p>
             <a:r>
-              <a:rPr lang="en-US" sz="4400" dirty="0">
+              <a:rPr lang="en-US" sz="5400" dirty="0">
                 <a:solidFill>
                   <a:schemeClr val="bg1"/>
                 </a:solidFill>
@@ -4628,7 +4702,7 @@
           </a:p>
           <a:p>
             <a:r>
-              <a:rPr lang="en-US" sz="4400" dirty="0">
+              <a:rPr lang="en-US" sz="5400" dirty="0">
                 <a:solidFill>
                   <a:schemeClr val="bg1"/>
                 </a:solidFill>
@@ -4640,7 +4714,7 @@
           </a:p>
           <a:p>
             <a:r>
-              <a:rPr lang="en-US" sz="4400" dirty="0">
+              <a:rPr lang="en-US" sz="5400" dirty="0">
                 <a:solidFill>
                   <a:schemeClr val="bg1"/>
                 </a:solidFill>
@@ -4724,7 +4798,7 @@
           </a:bodyPr>
           <a:lstStyle/>
           <a:p>
-            <a:endParaRPr lang="en-US" sz="4400" dirty="0">
+            <a:endParaRPr lang="en-US" sz="5400" dirty="0">
               <a:solidFill>
                 <a:schemeClr val="bg1"/>
               </a:solidFill>
@@ -4733,17 +4807,8 @@
             </a:endParaRPr>
           </a:p>
           <a:p>
-            <a:endParaRPr lang="en-US" sz="4400" dirty="0">
-              <a:solidFill>
-                <a:schemeClr val="bg1"/>
-              </a:solidFill>
-              <a:latin typeface="Avenir Medium" panose="02000503020000020003" pitchFamily="2" charset="0"/>
-              <a:ea typeface="Bodoni Ornaments" pitchFamily="2" charset="0"/>
-            </a:endParaRPr>
-          </a:p>
-          <a:p>
-            <a:r>
-              <a:rPr lang="en-US" sz="4400" dirty="0">
+            <a:r>
+              <a:rPr lang="en-US" sz="5400" dirty="0">
                 <a:solidFill>
                   <a:schemeClr val="bg1"/>
                 </a:solidFill>
@@ -4755,7 +4820,7 @@
           </a:p>
           <a:p>
             <a:r>
-              <a:rPr lang="en-US" sz="4400" dirty="0">
+              <a:rPr lang="en-US" sz="5400" dirty="0">
                 <a:solidFill>
                   <a:schemeClr val="bg1"/>
                 </a:solidFill>
@@ -4767,7 +4832,7 @@
           </a:p>
           <a:p>
             <a:r>
-              <a:rPr lang="en-US" sz="4400" dirty="0">
+              <a:rPr lang="en-US" sz="5400" dirty="0">
                 <a:solidFill>
                   <a:schemeClr val="bg1"/>
                 </a:solidFill>
@@ -4779,7 +4844,7 @@
           </a:p>
           <a:p>
             <a:r>
-              <a:rPr lang="en-US" sz="4400" dirty="0">
+              <a:rPr lang="en-US" sz="5400" dirty="0">
                 <a:solidFill>
                   <a:schemeClr val="bg1"/>
                 </a:solidFill>
@@ -4864,7 +4929,7 @@
           <a:lstStyle/>
           <a:p>
             <a:r>
-              <a:rPr lang="en-US" sz="4400" dirty="0">
+              <a:rPr lang="en-US" sz="5400" dirty="0">
                 <a:solidFill>
                   <a:schemeClr val="bg1"/>
                 </a:solidFill>
@@ -4875,7 +4940,31 @@
             </a:r>
           </a:p>
           <a:p>
-            <a:endParaRPr lang="en-US" sz="4400" dirty="0">
+            <a:r>
+              <a:rPr lang="en-US" sz="5400" dirty="0">
+                <a:solidFill>
+                  <a:schemeClr val="bg1"/>
+                </a:solidFill>
+                <a:latin typeface="Avenir Medium" panose="02000503020000020003" pitchFamily="2" charset="0"/>
+                <a:ea typeface="Bodoni Ornaments" pitchFamily="2" charset="0"/>
+              </a:rPr>
+              <a:t>And the angels cry "Holy"</a:t>
+            </a:r>
+          </a:p>
+          <a:p>
+            <a:r>
+              <a:rPr lang="en-US" sz="5400" dirty="0">
+                <a:solidFill>
+                  <a:schemeClr val="bg1"/>
+                </a:solidFill>
+                <a:latin typeface="Avenir Medium" panose="02000503020000020003" pitchFamily="2" charset="0"/>
+                <a:ea typeface="Bodoni Ornaments" pitchFamily="2" charset="0"/>
+              </a:rPr>
+              <a:t>All creation cries "Holy"</a:t>
+            </a:r>
+          </a:p>
+          <a:p>
+            <a:endParaRPr lang="en-US" sz="5400" dirty="0">
               <a:solidFill>
                 <a:schemeClr val="bg1"/>
               </a:solidFill>
@@ -4885,31 +4974,7 @@
           </a:p>
           <a:p>
             <a:r>
-              <a:rPr lang="en-US" sz="4400" dirty="0">
-                <a:solidFill>
-                  <a:schemeClr val="bg1"/>
-                </a:solidFill>
-                <a:latin typeface="Avenir Medium" panose="02000503020000020003" pitchFamily="2" charset="0"/>
-                <a:ea typeface="Bodoni Ornaments" pitchFamily="2" charset="0"/>
-              </a:rPr>
-              <a:t>And the angels cry "Holy"</a:t>
-            </a:r>
-          </a:p>
-          <a:p>
-            <a:r>
-              <a:rPr lang="en-US" sz="4400" dirty="0">
-                <a:solidFill>
-                  <a:schemeClr val="bg1"/>
-                </a:solidFill>
-                <a:latin typeface="Avenir Medium" panose="02000503020000020003" pitchFamily="2" charset="0"/>
-                <a:ea typeface="Bodoni Ornaments" pitchFamily="2" charset="0"/>
-              </a:rPr>
-              <a:t>All creation cries "Holy"</a:t>
-            </a:r>
-          </a:p>
-          <a:p>
-            <a:r>
-              <a:rPr lang="en-US" sz="4400" dirty="0">
+              <a:rPr lang="en-US" sz="5400" dirty="0">
                 <a:solidFill>
                   <a:schemeClr val="bg1"/>
                 </a:solidFill>
@@ -4921,7 +4986,7 @@
           </a:p>
           <a:p>
             <a:r>
-              <a:rPr lang="en-US" sz="4400" dirty="0">
+              <a:rPr lang="en-US" sz="5400" dirty="0">
                 <a:solidFill>
                   <a:schemeClr val="bg1"/>
                 </a:solidFill>
@@ -5005,7 +5070,7 @@
           </a:bodyPr>
           <a:lstStyle/>
           <a:p>
-            <a:endParaRPr lang="en-US" sz="4400" dirty="0">
+            <a:endParaRPr lang="en-US" sz="5400" dirty="0">
               <a:solidFill>
                 <a:schemeClr val="bg1"/>
               </a:solidFill>
@@ -5014,7 +5079,31 @@
             </a:endParaRPr>
           </a:p>
           <a:p>
-            <a:endParaRPr lang="en-US" sz="4400" dirty="0">
+            <a:r>
+              <a:rPr lang="en-US" sz="5400" dirty="0">
+                <a:solidFill>
+                  <a:schemeClr val="bg1"/>
+                </a:solidFill>
+                <a:latin typeface="Avenir Medium" panose="02000503020000020003" pitchFamily="2" charset="0"/>
+                <a:ea typeface="Bodoni Ornaments" pitchFamily="2" charset="0"/>
+              </a:rPr>
+              <a:t>If you've been forgiven </a:t>
+            </a:r>
+          </a:p>
+          <a:p>
+            <a:r>
+              <a:rPr lang="en-US" sz="5400" dirty="0">
+                <a:solidFill>
+                  <a:schemeClr val="bg1"/>
+                </a:solidFill>
+                <a:latin typeface="Avenir Medium" panose="02000503020000020003" pitchFamily="2" charset="0"/>
+                <a:ea typeface="Bodoni Ornaments" pitchFamily="2" charset="0"/>
+              </a:rPr>
+              <a:t>and if you've been redeemed</a:t>
+            </a:r>
+          </a:p>
+          <a:p>
+            <a:endParaRPr lang="en-US" sz="5400" dirty="0">
               <a:solidFill>
                 <a:schemeClr val="bg1"/>
               </a:solidFill>
@@ -5024,31 +5113,7 @@
           </a:p>
           <a:p>
             <a:r>
-              <a:rPr lang="en-US" sz="4400" dirty="0">
-                <a:solidFill>
-                  <a:schemeClr val="bg1"/>
-                </a:solidFill>
-                <a:latin typeface="Avenir Medium" panose="02000503020000020003" pitchFamily="2" charset="0"/>
-                <a:ea typeface="Bodoni Ornaments" pitchFamily="2" charset="0"/>
-              </a:rPr>
-              <a:t>If you've been forgiven </a:t>
-            </a:r>
-          </a:p>
-          <a:p>
-            <a:r>
-              <a:rPr lang="en-US" sz="4400" dirty="0">
-                <a:solidFill>
-                  <a:schemeClr val="bg1"/>
-                </a:solidFill>
-                <a:latin typeface="Avenir Medium" panose="02000503020000020003" pitchFamily="2" charset="0"/>
-                <a:ea typeface="Bodoni Ornaments" pitchFamily="2" charset="0"/>
-              </a:rPr>
-              <a:t>and if you've been redeemed</a:t>
-            </a:r>
-          </a:p>
-          <a:p>
-            <a:r>
-              <a:rPr lang="en-US" sz="4400" dirty="0">
+              <a:rPr lang="en-US" sz="5400" dirty="0">
                 <a:solidFill>
                   <a:schemeClr val="bg1"/>
                 </a:solidFill>
@@ -5132,7 +5197,7 @@
           </a:bodyPr>
           <a:lstStyle/>
           <a:p>
-            <a:endParaRPr lang="en-US" sz="4400" dirty="0">
+            <a:endParaRPr lang="en-US" sz="5400" dirty="0">
               <a:solidFill>
                 <a:schemeClr val="bg1"/>
               </a:solidFill>
@@ -5142,7 +5207,7 @@
           </a:p>
           <a:p>
             <a:r>
-              <a:rPr lang="en-US" sz="4400" dirty="0">
+              <a:rPr lang="en-US" sz="5400" dirty="0">
                 <a:solidFill>
                   <a:schemeClr val="bg1"/>
                 </a:solidFill>
@@ -5154,7 +5219,7 @@
           </a:p>
           <a:p>
             <a:r>
-              <a:rPr lang="en-US" sz="4400" dirty="0">
+              <a:rPr lang="en-US" sz="5400" dirty="0">
                 <a:solidFill>
                   <a:schemeClr val="bg1"/>
                 </a:solidFill>
@@ -5166,7 +5231,7 @@
           </a:p>
           <a:p>
             <a:r>
-              <a:rPr lang="en-US" sz="4400" dirty="0">
+              <a:rPr lang="en-US" sz="5400" dirty="0">
                 <a:solidFill>
                   <a:schemeClr val="bg1"/>
                 </a:solidFill>
@@ -5174,39 +5239,6 @@
                 <a:ea typeface="Bodoni Ornaments" pitchFamily="2" charset="0"/>
               </a:rPr>
               <a:t>Sing the song forever to the Lamb</a:t>
-            </a:r>
-          </a:p>
-          <a:p>
-            <a:endParaRPr lang="en-US" sz="4400" dirty="0">
-              <a:solidFill>
-                <a:schemeClr val="bg1"/>
-              </a:solidFill>
-              <a:latin typeface="Avenir Medium" panose="02000503020000020003" pitchFamily="2" charset="0"/>
-              <a:ea typeface="Bodoni Ornaments" pitchFamily="2" charset="0"/>
-            </a:endParaRPr>
-          </a:p>
-          <a:p>
-            <a:r>
-              <a:rPr lang="en-US" sz="4400" dirty="0">
-                <a:solidFill>
-                  <a:schemeClr val="bg1"/>
-                </a:solidFill>
-                <a:latin typeface="Avenir Medium" panose="02000503020000020003" pitchFamily="2" charset="0"/>
-                <a:ea typeface="Bodoni Ornaments" pitchFamily="2" charset="0"/>
-              </a:rPr>
-              <a:t>We'll sing the song forever </a:t>
-            </a:r>
-          </a:p>
-          <a:p>
-            <a:r>
-              <a:rPr lang="en-US" sz="4400" dirty="0">
-                <a:solidFill>
-                  <a:schemeClr val="bg1"/>
-                </a:solidFill>
-                <a:latin typeface="Avenir Medium" panose="02000503020000020003" pitchFamily="2" charset="0"/>
-                <a:ea typeface="Bodoni Ornaments" pitchFamily="2" charset="0"/>
-              </a:rPr>
-              <a:t>and amen</a:t>
             </a:r>
           </a:p>
         </p:txBody>
@@ -5240,7 +5272,7 @@
         <p:cNvPr id="1" name="">
           <a:extLst>
             <a:ext uri="{FF2B5EF4-FFF2-40B4-BE49-F238E27FC236}">
-              <a16:creationId xmlns:a16="http://schemas.microsoft.com/office/drawing/2014/main" id="{1651CC6A-1E8A-66BC-42DF-F1D3B7E3CF70}"/>
+              <a16:creationId xmlns:a16="http://schemas.microsoft.com/office/drawing/2014/main" id="{D1742A00-026B-524A-13ED-55B1A5BA72EE}"/>
             </a:ext>
           </a:extLst>
         </p:cNvPr>
@@ -5260,7 +5292,7 @@
           <p:cNvPr id="3" name="Subtitle 2">
             <a:extLst>
               <a:ext uri="{FF2B5EF4-FFF2-40B4-BE49-F238E27FC236}">
-                <a16:creationId xmlns:a16="http://schemas.microsoft.com/office/drawing/2014/main" id="{9B9D23CB-A920-4E3B-455F-0A28CC677C2B}"/>
+                <a16:creationId xmlns:a16="http://schemas.microsoft.com/office/drawing/2014/main" id="{B86FC233-4688-F518-73DE-C1F37358D221}"/>
               </a:ext>
             </a:extLst>
           </p:cNvPr>
@@ -5273,8 +5305,8 @@
         </p:nvSpPr>
         <p:spPr>
           <a:xfrm>
-            <a:off x="144379" y="207818"/>
-            <a:ext cx="8903369" cy="6386945"/>
+            <a:off x="84221" y="207818"/>
+            <a:ext cx="8891337" cy="6373091"/>
           </a:xfrm>
         </p:spPr>
         <p:txBody>
@@ -5283,19 +5315,7 @@
           </a:bodyPr>
           <a:lstStyle/>
           <a:p>
-            <a:r>
-              <a:rPr lang="en-US" sz="4400" dirty="0">
-                <a:solidFill>
-                  <a:schemeClr val="bg1"/>
-                </a:solidFill>
-                <a:latin typeface="Avenir Medium" panose="02000503020000020003" pitchFamily="2" charset="0"/>
-                <a:ea typeface="Bodoni Ornaments" pitchFamily="2" charset="0"/>
-              </a:rPr>
-              <a:t> </a:t>
-            </a:r>
-          </a:p>
-          <a:p>
-            <a:endParaRPr lang="en-US" sz="4400" dirty="0">
+            <a:endParaRPr lang="en-US" sz="5400" dirty="0">
               <a:solidFill>
                 <a:schemeClr val="bg1"/>
               </a:solidFill>
@@ -5305,50 +5325,26 @@
           </a:p>
           <a:p>
             <a:r>
-              <a:rPr lang="en-US" sz="4400" dirty="0">
-                <a:solidFill>
-                  <a:schemeClr val="bg1"/>
-                </a:solidFill>
-                <a:latin typeface="Avenir Medium" panose="02000503020000020003" pitchFamily="2" charset="0"/>
-                <a:ea typeface="Bodoni Ornaments" pitchFamily="2" charset="0"/>
-              </a:rPr>
-              <a:t>And the angels cry "Holy"</a:t>
-            </a:r>
-          </a:p>
-          <a:p>
-            <a:r>
-              <a:rPr lang="en-US" sz="4400" dirty="0">
-                <a:solidFill>
-                  <a:schemeClr val="bg1"/>
-                </a:solidFill>
-                <a:latin typeface="Avenir Medium" panose="02000503020000020003" pitchFamily="2" charset="0"/>
-                <a:ea typeface="Bodoni Ornaments" pitchFamily="2" charset="0"/>
-              </a:rPr>
-              <a:t>All creation cries "Holy"</a:t>
-            </a:r>
-          </a:p>
-          <a:p>
-            <a:r>
-              <a:rPr lang="en-US" sz="4400" dirty="0">
-                <a:solidFill>
-                  <a:schemeClr val="bg1"/>
-                </a:solidFill>
-                <a:latin typeface="Avenir Medium" panose="02000503020000020003" pitchFamily="2" charset="0"/>
-                <a:ea typeface="Bodoni Ornaments" pitchFamily="2" charset="0"/>
-              </a:rPr>
-              <a:t>You are lifted high, holy</a:t>
-            </a:r>
-          </a:p>
-          <a:p>
-            <a:r>
-              <a:rPr lang="en-US" sz="4400" dirty="0">
-                <a:solidFill>
-                  <a:schemeClr val="bg1"/>
-                </a:solidFill>
-                <a:latin typeface="Avenir Medium" panose="02000503020000020003" pitchFamily="2" charset="0"/>
-                <a:ea typeface="Bodoni Ornaments" pitchFamily="2" charset="0"/>
-              </a:rPr>
-              <a:t>Holy forever</a:t>
+              <a:rPr lang="en-US" sz="5400" dirty="0">
+                <a:solidFill>
+                  <a:schemeClr val="bg1"/>
+                </a:solidFill>
+                <a:latin typeface="Avenir Medium" panose="02000503020000020003" pitchFamily="2" charset="0"/>
+                <a:ea typeface="Bodoni Ornaments" pitchFamily="2" charset="0"/>
+              </a:rPr>
+              <a:t>We'll sing the song </a:t>
+            </a:r>
+          </a:p>
+          <a:p>
+            <a:r>
+              <a:rPr lang="en-US" sz="5400" dirty="0">
+                <a:solidFill>
+                  <a:schemeClr val="bg1"/>
+                </a:solidFill>
+                <a:latin typeface="Avenir Medium" panose="02000503020000020003" pitchFamily="2" charset="0"/>
+                <a:ea typeface="Bodoni Ornaments" pitchFamily="2" charset="0"/>
+              </a:rPr>
+              <a:t>forever and amen</a:t>
             </a:r>
           </a:p>
         </p:txBody>
@@ -5356,7 +5352,7 @@
     </p:spTree>
     <p:extLst>
       <p:ext uri="{BB962C8B-B14F-4D97-AF65-F5344CB8AC3E}">
-        <p14:creationId xmlns:p14="http://schemas.microsoft.com/office/powerpoint/2010/main" val="95335863"/>
+        <p14:creationId xmlns:p14="http://schemas.microsoft.com/office/powerpoint/2010/main" val="2821108704"/>
       </p:ext>
     </p:extLst>
   </p:cSld>
